--- a/generated/Tier 1 Broker Scorecards/Justin Wilson_Broker_Scorecard.pptx
+++ b/generated/Tier 1 Broker Scorecards/Justin Wilson_Broker_Scorecard.pptx
@@ -3394,7 +3394,7 @@
                         <a:rPr sz="900">
                           <a:latin typeface="Segoe UI"/>
                         </a:rPr>
-                        <a:t>Tier 1  |  8.52% / 15.00%</a:t>
+                        <a:t>Tier 1  |  8.10% / 15.00%</a:t>
                       </a:r>
                     </a:p>
                   </a:txBody>
@@ -3690,7 +3690,7 @@
                         <a:rPr sz="900">
                           <a:latin typeface="Segoe UI"/>
                         </a:rPr>
-                        <a:t>Fleet Bound Premium: $310,079.29</a:t>
+                        <a:t>Fleet Bound Premium: $317,039.33</a:t>
                       </a:r>
                     </a:p>
                   </a:txBody>
@@ -3727,7 +3727,7 @@
                         <a:rPr sz="900">
                           <a:latin typeface="Segoe UI"/>
                         </a:rPr>
-                        <a:t>Fleet Book %: 57.5%</a:t>
+                        <a:t>Fleet Book %: 58.8%</a:t>
                       </a:r>
                     </a:p>
                   </a:txBody>
@@ -3766,7 +3766,7 @@
                         <a:rPr sz="900">
                           <a:latin typeface="Segoe UI"/>
                         </a:rPr>
-                        <a:t>Non-Fleet Subs: 303  |  Binds: 23</a:t>
+                        <a:t>Non-Fleet Subs: 307  |  Binds: 22</a:t>
                       </a:r>
                     </a:p>
                   </a:txBody>
@@ -3803,7 +3803,7 @@
                         <a:rPr sz="900">
                           <a:latin typeface="Segoe UI"/>
                         </a:rPr>
-                        <a:t>Non-Fleet Bound Premium: $229,512.06</a:t>
+                        <a:t>Non-Fleet Bound Premium: $222,552.02</a:t>
                       </a:r>
                     </a:p>
                   </a:txBody>
@@ -3840,7 +3840,7 @@
                         <a:rPr sz="900">
                           <a:latin typeface="Segoe UI"/>
                         </a:rPr>
-                        <a:t>Non-Fleet Book %: 42.5%</a:t>
+                        <a:t>Non-Fleet Book %: 41.2%</a:t>
                       </a:r>
                     </a:p>
                   </a:txBody>
@@ -4428,7 +4428,7 @@
                           </a:solidFill>
                           <a:latin typeface="Segoe UI"/>
                         </a:rPr>
-                        <a:t>38</a:t>
+                        <a:t>42</a:t>
                       </a:r>
                     </a:p>
                   </a:txBody>
@@ -4465,7 +4465,7 @@
                         <a:rPr sz="800">
                           <a:latin typeface="Segoe UI"/>
                         </a:rPr>
-                        <a:t>125</a:t>
+                        <a:t>124</a:t>
                       </a:r>
                     </a:p>
                   </a:txBody>
@@ -4707,7 +4707,7 @@
                           </a:solidFill>
                           <a:latin typeface="Segoe UI"/>
                         </a:rPr>
-                        <a:t>7.9%</a:t>
+                        <a:t>7.1%</a:t>
                       </a:r>
                     </a:p>
                   </a:txBody>
@@ -4747,7 +4747,7 @@
                         <a:rPr sz="800">
                           <a:latin typeface="Segoe UI"/>
                         </a:rPr>
-                        <a:t>15.2%</a:t>
+                        <a:t>15.3%</a:t>
                       </a:r>
                     </a:p>
                   </a:txBody>

--- a/generated/Tier 1 Broker Scorecards/Justin Wilson_Broker_Scorecard.pptx
+++ b/generated/Tier 1 Broker Scorecards/Justin Wilson_Broker_Scorecard.pptx
@@ -3394,7 +3394,7 @@
                         <a:rPr sz="900">
                           <a:latin typeface="Segoe UI"/>
                         </a:rPr>
-                        <a:t>Tier 1  |  8.10% / 15.00%</a:t>
+                        <a:t>Tier 1  |  7.67% / 15.00%</a:t>
                       </a:r>
                     </a:p>
                   </a:txBody>
@@ -3653,7 +3653,7 @@
                         <a:rPr sz="900">
                           <a:latin typeface="Segoe UI"/>
                         </a:rPr>
-                        <a:t>Fleet Subs: 14  |  Binds: 4</a:t>
+                        <a:t>Fleet Subs: 13  |  Binds: 2</a:t>
                       </a:r>
                     </a:p>
                   </a:txBody>
@@ -3690,7 +3690,7 @@
                         <a:rPr sz="900">
                           <a:latin typeface="Segoe UI"/>
                         </a:rPr>
-                        <a:t>Fleet Bound Premium: $317,039.33</a:t>
+                        <a:t>Fleet Bound Premium: $250,481.53</a:t>
                       </a:r>
                     </a:p>
                   </a:txBody>
@@ -3727,7 +3727,7 @@
                         <a:rPr sz="900">
                           <a:latin typeface="Segoe UI"/>
                         </a:rPr>
-                        <a:t>Fleet Book %: 58.8%</a:t>
+                        <a:t>Fleet Book %: 46.4%</a:t>
                       </a:r>
                     </a:p>
                   </a:txBody>
@@ -3766,7 +3766,7 @@
                         <a:rPr sz="900">
                           <a:latin typeface="Segoe UI"/>
                         </a:rPr>
-                        <a:t>Non-Fleet Subs: 307  |  Binds: 22</a:t>
+                        <a:t>Non-Fleet Subs: 313  |  Binds: 23</a:t>
                       </a:r>
                     </a:p>
                   </a:txBody>
@@ -3803,7 +3803,7 @@
                         <a:rPr sz="900">
                           <a:latin typeface="Segoe UI"/>
                         </a:rPr>
-                        <a:t>Non-Fleet Bound Premium: $222,552.02</a:t>
+                        <a:t>Non-Fleet Bound Premium: $289,109.82</a:t>
                       </a:r>
                     </a:p>
                   </a:txBody>
@@ -3840,7 +3840,7 @@
                         <a:rPr sz="900">
                           <a:latin typeface="Segoe UI"/>
                         </a:rPr>
-                        <a:t>Non-Fleet Book %: 41.2%</a:t>
+                        <a:t>Non-Fleet Book %: 53.6%</a:t>
                       </a:r>
                     </a:p>
                   </a:txBody>
@@ -4428,7 +4428,7 @@
                           </a:solidFill>
                           <a:latin typeface="Segoe UI"/>
                         </a:rPr>
-                        <a:t>42</a:t>
+                        <a:t>49</a:t>
                       </a:r>
                     </a:p>
                   </a:txBody>
@@ -4581,7 +4581,7 @@
                         <a:rPr sz="800">
                           <a:latin typeface="Segoe UI"/>
                         </a:rPr>
-                        <a:t>14.7%</a:t>
+                        <a:t>13.7%</a:t>
                       </a:r>
                     </a:p>
                   </a:txBody>
@@ -4624,7 +4624,7 @@
                           </a:solidFill>
                           <a:latin typeface="Segoe UI"/>
                         </a:rPr>
-                        <a:t>18.1%</a:t>
+                        <a:t>16.9%</a:t>
                       </a:r>
                     </a:p>
                   </a:txBody>
@@ -4707,7 +4707,7 @@
                           </a:solidFill>
                           <a:latin typeface="Segoe UI"/>
                         </a:rPr>
-                        <a:t>7.1%</a:t>
+                        <a:t>6.1%</a:t>
                       </a:r>
                     </a:p>
                   </a:txBody>
@@ -4866,7 +4866,7 @@
                         <a:rPr sz="800">
                           <a:latin typeface="Segoe UI"/>
                         </a:rPr>
-                        <a:t>15</a:t>
+                        <a:t>14</a:t>
                       </a:r>
                     </a:p>
                   </a:txBody>
@@ -4903,7 +4903,7 @@
                         <a:rPr sz="800">
                           <a:latin typeface="Segoe UI"/>
                         </a:rPr>
-                        <a:t>15</a:t>
+                        <a:t>14</a:t>
                       </a:r>
                     </a:p>
                   </a:txBody>

--- a/generated/Tier 1 Broker Scorecards/Justin Wilson_Broker_Scorecard.pptx
+++ b/generated/Tier 1 Broker Scorecards/Justin Wilson_Broker_Scorecard.pptx
@@ -3357,7 +3357,7 @@
                         <a:rPr sz="800">
                           <a:latin typeface="Segoe UI"/>
                         </a:rPr>
-                        <a:t>$1,960,018.98 / $2,020,772.99 / $539,591.35</a:t>
+                        <a:t>$1,960,018.98 / $2,019,694.65 / $538,513.01</a:t>
                       </a:r>
                     </a:p>
                   </a:txBody>
@@ -3394,7 +3394,7 @@
                         <a:rPr sz="900">
                           <a:latin typeface="Segoe UI"/>
                         </a:rPr>
-                        <a:t>Tier 1  |  7.67% / 15.00%</a:t>
+                        <a:t>Tier 1  |  7.93% / 15.00%</a:t>
                       </a:r>
                     </a:p>
                   </a:txBody>
@@ -3431,7 +3431,7 @@
                         <a:rPr sz="900">
                           <a:latin typeface="Segoe UI"/>
                         </a:rPr>
-                        <a:t>$2,744,026.57  (19.7% achieved)</a:t>
+                        <a:t>$2,744,026.57  (19.6% achieved)</a:t>
                       </a:r>
                     </a:p>
                   </a:txBody>
@@ -3653,7 +3653,7 @@
                         <a:rPr sz="900">
                           <a:latin typeface="Segoe UI"/>
                         </a:rPr>
-                        <a:t>Fleet Subs: 13  |  Binds: 2</a:t>
+                        <a:t>Fleet Subs: 14  |  Binds: 3</a:t>
                       </a:r>
                     </a:p>
                   </a:txBody>
@@ -3690,7 +3690,7 @@
                         <a:rPr sz="900">
                           <a:latin typeface="Segoe UI"/>
                         </a:rPr>
-                        <a:t>Fleet Bound Premium: $250,481.53</a:t>
+                        <a:t>Fleet Bound Premium: $277,904.34</a:t>
                       </a:r>
                     </a:p>
                   </a:txBody>
@@ -3727,7 +3727,7 @@
                         <a:rPr sz="900">
                           <a:latin typeface="Segoe UI"/>
                         </a:rPr>
-                        <a:t>Fleet Book %: 46.4%</a:t>
+                        <a:t>Fleet Book %: 51.6%</a:t>
                       </a:r>
                     </a:p>
                   </a:txBody>
@@ -3766,7 +3766,7 @@
                         <a:rPr sz="900">
                           <a:latin typeface="Segoe UI"/>
                         </a:rPr>
-                        <a:t>Non-Fleet Subs: 313  |  Binds: 23</a:t>
+                        <a:t>Non-Fleet Subs: 314  |  Binds: 23</a:t>
                       </a:r>
                     </a:p>
                   </a:txBody>
@@ -3803,7 +3803,7 @@
                         <a:rPr sz="900">
                           <a:latin typeface="Segoe UI"/>
                         </a:rPr>
-                        <a:t>Non-Fleet Bound Premium: $289,109.82</a:t>
+                        <a:t>Non-Fleet Bound Premium: $260,608.67</a:t>
                       </a:r>
                     </a:p>
                   </a:txBody>
@@ -3840,7 +3840,7 @@
                         <a:rPr sz="900">
                           <a:latin typeface="Segoe UI"/>
                         </a:rPr>
-                        <a:t>Non-Fleet Book %: 53.6%</a:t>
+                        <a:t>Non-Fleet Book %: 48.4%</a:t>
                       </a:r>
                     </a:p>
                   </a:txBody>
@@ -4428,7 +4428,7 @@
                           </a:solidFill>
                           <a:latin typeface="Segoe UI"/>
                         </a:rPr>
-                        <a:t>49</a:t>
+                        <a:t>52</a:t>
                       </a:r>
                     </a:p>
                   </a:txBody>
@@ -4624,7 +4624,7 @@
                           </a:solidFill>
                           <a:latin typeface="Segoe UI"/>
                         </a:rPr>
-                        <a:t>16.9%</a:t>
+                        <a:t>18.1%</a:t>
                       </a:r>
                     </a:p>
                   </a:txBody>
@@ -4707,7 +4707,7 @@
                           </a:solidFill>
                           <a:latin typeface="Segoe UI"/>
                         </a:rPr>
-                        <a:t>6.1%</a:t>
+                        <a:t>5.8%</a:t>
                       </a:r>
                     </a:p>
                   </a:txBody>
@@ -4901,9 +4901,12 @@
                       <a:pPr algn="ctr"/>
                       <a:r>
                         <a:rPr sz="800">
+                          <a:solidFill>
+                            <a:srgbClr val="059669"/>
+                          </a:solidFill>
                           <a:latin typeface="Segoe UI"/>
                         </a:rPr>
-                        <a:t>14</a:t>
+                        <a:t>15</a:t>
                       </a:r>
                     </a:p>
                   </a:txBody>
@@ -5259,7 +5262,7 @@
                           </a:solidFill>
                           <a:latin typeface="Segoe UI"/>
                         </a:rPr>
-                        <a:t>$13.4K</a:t>
+                        <a:t>$12.3K</a:t>
                       </a:r>
                     </a:p>
                   </a:txBody>

--- a/generated/Tier 1 Broker Scorecards/Justin Wilson_Broker_Scorecard.pptx
+++ b/generated/Tier 1 Broker Scorecards/Justin Wilson_Broker_Scorecard.pptx
@@ -3357,7 +3357,7 @@
                         <a:rPr sz="800">
                           <a:latin typeface="Segoe UI"/>
                         </a:rPr>
-                        <a:t>$1,960,018.98 / $2,019,694.65 / $538,513.01</a:t>
+                        <a:t>$1,960,018.98 / $2,024,112.65 / $542,931.01</a:t>
                       </a:r>
                     </a:p>
                   </a:txBody>
@@ -3394,7 +3394,7 @@
                         <a:rPr sz="900">
                           <a:latin typeface="Segoe UI"/>
                         </a:rPr>
-                        <a:t>Tier 1  |  7.93% / 15.00%</a:t>
+                        <a:t>Tier 1  |  7.83% / 15.00%</a:t>
                       </a:r>
                     </a:p>
                   </a:txBody>
@@ -3431,7 +3431,7 @@
                         <a:rPr sz="900">
                           <a:latin typeface="Segoe UI"/>
                         </a:rPr>
-                        <a:t>$2,744,026.57  (19.6% achieved)</a:t>
+                        <a:t>$2,744,026.57  (19.8% achieved)</a:t>
                       </a:r>
                     </a:p>
                   </a:txBody>
@@ -3690,7 +3690,7 @@
                         <a:rPr sz="900">
                           <a:latin typeface="Segoe UI"/>
                         </a:rPr>
-                        <a:t>Fleet Bound Premium: $277,904.34</a:t>
+                        <a:t>Fleet Bound Premium: $285,902.92</a:t>
                       </a:r>
                     </a:p>
                   </a:txBody>
@@ -3727,7 +3727,7 @@
                         <a:rPr sz="900">
                           <a:latin typeface="Segoe UI"/>
                         </a:rPr>
-                        <a:t>Fleet Book %: 51.6%</a:t>
+                        <a:t>Fleet Book %: 52.7%</a:t>
                       </a:r>
                     </a:p>
                   </a:txBody>
@@ -3766,7 +3766,7 @@
                         <a:rPr sz="900">
                           <a:latin typeface="Segoe UI"/>
                         </a:rPr>
-                        <a:t>Non-Fleet Subs: 314  |  Binds: 23</a:t>
+                        <a:t>Non-Fleet Subs: 318  |  Binds: 23</a:t>
                       </a:r>
                     </a:p>
                   </a:txBody>
@@ -3803,7 +3803,7 @@
                         <a:rPr sz="900">
                           <a:latin typeface="Segoe UI"/>
                         </a:rPr>
-                        <a:t>Non-Fleet Bound Premium: $260,608.67</a:t>
+                        <a:t>Non-Fleet Bound Premium: $257,028.09</a:t>
                       </a:r>
                     </a:p>
                   </a:txBody>
@@ -3840,7 +3840,7 @@
                         <a:rPr sz="900">
                           <a:latin typeface="Segoe UI"/>
                         </a:rPr>
-                        <a:t>Non-Fleet Book %: 48.4%</a:t>
+                        <a:t>Non-Fleet Book %: 47.3%</a:t>
                       </a:r>
                     </a:p>
                   </a:txBody>
@@ -4428,7 +4428,7 @@
                           </a:solidFill>
                           <a:latin typeface="Segoe UI"/>
                         </a:rPr>
-                        <a:t>52</a:t>
+                        <a:t>56</a:t>
                       </a:r>
                     </a:p>
                   </a:txBody>
@@ -4581,7 +4581,7 @@
                         <a:rPr sz="800">
                           <a:latin typeface="Segoe UI"/>
                         </a:rPr>
-                        <a:t>13.7%</a:t>
+                        <a:t>14.7%</a:t>
                       </a:r>
                     </a:p>
                   </a:txBody>
@@ -4707,7 +4707,7 @@
                           </a:solidFill>
                           <a:latin typeface="Segoe UI"/>
                         </a:rPr>
-                        <a:t>5.8%</a:t>
+                        <a:t>7.1%</a:t>
                       </a:r>
                     </a:p>
                   </a:txBody>
@@ -4866,46 +4866,6 @@
                         <a:rPr sz="800">
                           <a:latin typeface="Segoe UI"/>
                         </a:rPr>
-                        <a:t>14</a:t>
-                      </a:r>
-                    </a:p>
-                  </a:txBody>
-                  <a:tcPr marL="114300" marR="91425" marT="45700" marB="45700">
-                    <a:lnL w="6350" cap="flat" cmpd="sng">
-                      <a:solidFill>
-                        <a:srgbClr val="E5E7EB"/>
-                      </a:solidFill>
-                    </a:lnL>
-                    <a:lnR w="6350" cap="flat" cmpd="sng">
-                      <a:solidFill>
-                        <a:srgbClr val="E5E7EB"/>
-                      </a:solidFill>
-                    </a:lnR>
-                    <a:lnT w="6350" cap="flat" cmpd="sng">
-                      <a:solidFill>
-                        <a:srgbClr val="E5E7EB"/>
-                      </a:solidFill>
-                    </a:lnT>
-                    <a:lnB w="6350" cap="flat" cmpd="sng">
-                      <a:solidFill>
-                        <a:srgbClr val="E5E7EB"/>
-                      </a:solidFill>
-                    </a:lnB>
-                  </a:tcPr>
-                </a:tc>
-                <a:tc>
-                  <a:txBody>
-                    <a:bodyPr/>
-                    <a:lstStyle/>
-                    <a:p>
-                      <a:pPr algn="ctr"/>
-                      <a:r>
-                        <a:rPr sz="800">
-                          <a:solidFill>
-                            <a:srgbClr val="059669"/>
-                          </a:solidFill>
-                          <a:latin typeface="Segoe UI"/>
-                        </a:rPr>
                         <a:t>15</a:t>
                       </a:r>
                     </a:p>
@@ -4978,12 +4938,49 @@
                       <a:pPr algn="ctr"/>
                       <a:r>
                         <a:rPr sz="800">
+                          <a:latin typeface="Segoe UI"/>
+                        </a:rPr>
+                        <a:t>15</a:t>
+                      </a:r>
+                    </a:p>
+                  </a:txBody>
+                  <a:tcPr marL="114300" marR="91425" marT="45700" marB="45700">
+                    <a:lnL w="6350" cap="flat" cmpd="sng">
+                      <a:solidFill>
+                        <a:srgbClr val="E5E7EB"/>
+                      </a:solidFill>
+                    </a:lnL>
+                    <a:lnR w="6350" cap="flat" cmpd="sng">
+                      <a:solidFill>
+                        <a:srgbClr val="E5E7EB"/>
+                      </a:solidFill>
+                    </a:lnR>
+                    <a:lnT w="6350" cap="flat" cmpd="sng">
+                      <a:solidFill>
+                        <a:srgbClr val="E5E7EB"/>
+                      </a:solidFill>
+                    </a:lnT>
+                    <a:lnB w="6350" cap="flat" cmpd="sng">
+                      <a:solidFill>
+                        <a:srgbClr val="E5E7EB"/>
+                      </a:solidFill>
+                    </a:lnB>
+                  </a:tcPr>
+                </a:tc>
+                <a:tc>
+                  <a:txBody>
+                    <a:bodyPr/>
+                    <a:lstStyle/>
+                    <a:p>
+                      <a:pPr algn="ctr"/>
+                      <a:r>
+                        <a:rPr sz="800">
                           <a:solidFill>
                             <a:srgbClr val="DC2626"/>
                           </a:solidFill>
                           <a:latin typeface="Segoe UI"/>
                         </a:rPr>
-                        <a:t>3</a:t>
+                        <a:t>4</a:t>
                       </a:r>
                     </a:p>
                   </a:txBody>
@@ -5262,7 +5259,7 @@
                           </a:solidFill>
                           <a:latin typeface="Segoe UI"/>
                         </a:rPr>
-                        <a:t>$12.3K</a:t>
+                        <a:t>$16.7K</a:t>
                       </a:r>
                     </a:p>
                   </a:txBody>

--- a/generated/Tier 1 Broker Scorecards/Justin Wilson_Broker_Scorecard.pptx
+++ b/generated/Tier 1 Broker Scorecards/Justin Wilson_Broker_Scorecard.pptx
@@ -3394,7 +3394,7 @@
                         <a:rPr sz="900">
                           <a:latin typeface="Segoe UI"/>
                         </a:rPr>
-                        <a:t>Tier 1  |  7.83% / 15.00%</a:t>
+                        <a:t>Tier 1  |  8.13% / 15.00%</a:t>
                       </a:r>
                     </a:p>
                   </a:txBody>
@@ -3690,7 +3690,7 @@
                         <a:rPr sz="900">
                           <a:latin typeface="Segoe UI"/>
                         </a:rPr>
-                        <a:t>Fleet Bound Premium: $285,902.92</a:t>
+                        <a:t>Fleet Bound Premium: $278,797.11</a:t>
                       </a:r>
                     </a:p>
                   </a:txBody>
@@ -3727,7 +3727,7 @@
                         <a:rPr sz="900">
                           <a:latin typeface="Segoe UI"/>
                         </a:rPr>
-                        <a:t>Fleet Book %: 52.7%</a:t>
+                        <a:t>Fleet Book %: 51.4%</a:t>
                       </a:r>
                     </a:p>
                   </a:txBody>
@@ -3766,7 +3766,7 @@
                         <a:rPr sz="900">
                           <a:latin typeface="Segoe UI"/>
                         </a:rPr>
-                        <a:t>Non-Fleet Subs: 318  |  Binds: 23</a:t>
+                        <a:t>Non-Fleet Subs: 318  |  Binds: 24</a:t>
                       </a:r>
                     </a:p>
                   </a:txBody>
@@ -3803,7 +3803,7 @@
                         <a:rPr sz="900">
                           <a:latin typeface="Segoe UI"/>
                         </a:rPr>
-                        <a:t>Non-Fleet Bound Premium: $257,028.09</a:t>
+                        <a:t>Non-Fleet Bound Premium: $264,133.90</a:t>
                       </a:r>
                     </a:p>
                   </a:txBody>
@@ -3840,7 +3840,7 @@
                         <a:rPr sz="900">
                           <a:latin typeface="Segoe UI"/>
                         </a:rPr>
-                        <a:t>Non-Fleet Book %: 47.3%</a:t>
+                        <a:t>Non-Fleet Book %: 48.6%</a:t>
                       </a:r>
                     </a:p>
                   </a:txBody>
@@ -4428,7 +4428,7 @@
                           </a:solidFill>
                           <a:latin typeface="Segoe UI"/>
                         </a:rPr>
-                        <a:t>56</a:t>
+                        <a:t>58</a:t>
                       </a:r>
                     </a:p>
                   </a:txBody>
@@ -4465,7 +4465,7 @@
                         <a:rPr sz="800">
                           <a:latin typeface="Segoe UI"/>
                         </a:rPr>
-                        <a:t>124</a:t>
+                        <a:t>125</a:t>
                       </a:r>
                     </a:p>
                   </a:txBody>
@@ -4707,7 +4707,7 @@
                           </a:solidFill>
                           <a:latin typeface="Segoe UI"/>
                         </a:rPr>
-                        <a:t>7.1%</a:t>
+                        <a:t>6.9%</a:t>
                       </a:r>
                     </a:p>
                   </a:txBody>
@@ -4747,7 +4747,7 @@
                         <a:rPr sz="800">
                           <a:latin typeface="Segoe UI"/>
                         </a:rPr>
-                        <a:t>15.3%</a:t>
+                        <a:t>15.2%</a:t>
                       </a:r>
                     </a:p>
                   </a:txBody>

--- a/generated/Tier 1 Broker Scorecards/Justin Wilson_Broker_Scorecard.pptx
+++ b/generated/Tier 1 Broker Scorecards/Justin Wilson_Broker_Scorecard.pptx
@@ -3394,7 +3394,7 @@
                         <a:rPr sz="900">
                           <a:latin typeface="Segoe UI"/>
                         </a:rPr>
-                        <a:t>Tier 1  |  8.13% / 15.00%</a:t>
+                        <a:t>Tier 1  |  7.83% / 15.00%</a:t>
                       </a:r>
                     </a:p>
                   </a:txBody>
@@ -3653,7 +3653,7 @@
                         <a:rPr sz="900">
                           <a:latin typeface="Segoe UI"/>
                         </a:rPr>
-                        <a:t>Fleet Subs: 14  |  Binds: 3</a:t>
+                        <a:t>Fleet Subs: 13  |  Binds: 2</a:t>
                       </a:r>
                     </a:p>
                   </a:txBody>
@@ -3690,7 +3690,7 @@
                         <a:rPr sz="900">
                           <a:latin typeface="Segoe UI"/>
                         </a:rPr>
-                        <a:t>Fleet Bound Premium: $278,797.11</a:t>
+                        <a:t>Fleet Bound Premium: $250,651.06</a:t>
                       </a:r>
                     </a:p>
                   </a:txBody>
@@ -3727,7 +3727,7 @@
                         <a:rPr sz="900">
                           <a:latin typeface="Segoe UI"/>
                         </a:rPr>
-                        <a:t>Fleet Book %: 51.4%</a:t>
+                        <a:t>Fleet Book %: 46.2%</a:t>
                       </a:r>
                     </a:p>
                   </a:txBody>
@@ -3766,7 +3766,7 @@
                         <a:rPr sz="900">
                           <a:latin typeface="Segoe UI"/>
                         </a:rPr>
-                        <a:t>Non-Fleet Subs: 318  |  Binds: 24</a:t>
+                        <a:t>Non-Fleet Subs: 319  |  Binds: 24</a:t>
                       </a:r>
                     </a:p>
                   </a:txBody>
@@ -3803,7 +3803,7 @@
                         <a:rPr sz="900">
                           <a:latin typeface="Segoe UI"/>
                         </a:rPr>
-                        <a:t>Non-Fleet Bound Premium: $264,133.90</a:t>
+                        <a:t>Non-Fleet Bound Premium: $292,279.95</a:t>
                       </a:r>
                     </a:p>
                   </a:txBody>
@@ -3840,7 +3840,7 @@
                         <a:rPr sz="900">
                           <a:latin typeface="Segoe UI"/>
                         </a:rPr>
-                        <a:t>Non-Fleet Book %: 48.6%</a:t>
+                        <a:t>Non-Fleet Book %: 53.8%</a:t>
                       </a:r>
                     </a:p>
                   </a:txBody>
@@ -4581,7 +4581,7 @@
                         <a:rPr sz="800">
                           <a:latin typeface="Segoe UI"/>
                         </a:rPr>
-                        <a:t>14.7%</a:t>
+                        <a:t>13.7%</a:t>
                       </a:r>
                     </a:p>
                   </a:txBody>
@@ -4624,7 +4624,7 @@
                           </a:solidFill>
                           <a:latin typeface="Segoe UI"/>
                         </a:rPr>
-                        <a:t>18.1%</a:t>
+                        <a:t>16.9%</a:t>
                       </a:r>
                     </a:p>
                   </a:txBody>
@@ -4866,7 +4866,7 @@
                         <a:rPr sz="800">
                           <a:latin typeface="Segoe UI"/>
                         </a:rPr>
-                        <a:t>15</a:t>
+                        <a:t>14</a:t>
                       </a:r>
                     </a:p>
                   </a:txBody>
@@ -4903,7 +4903,7 @@
                         <a:rPr sz="800">
                           <a:latin typeface="Segoe UI"/>
                         </a:rPr>
-                        <a:t>15</a:t>
+                        <a:t>14</a:t>
                       </a:r>
                     </a:p>
                   </a:txBody>

--- a/generated/Tier 1 Broker Scorecards/Justin Wilson_Broker_Scorecard.pptx
+++ b/generated/Tier 1 Broker Scorecards/Justin Wilson_Broker_Scorecard.pptx
@@ -3394,7 +3394,7 @@
                         <a:rPr sz="900">
                           <a:latin typeface="Segoe UI"/>
                         </a:rPr>
-                        <a:t>Tier 1  |  7.83% / 15.00%</a:t>
+                        <a:t>Tier 1  |  8.13% / 15.00%</a:t>
                       </a:r>
                     </a:p>
                   </a:txBody>
@@ -3653,7 +3653,7 @@
                         <a:rPr sz="900">
                           <a:latin typeface="Segoe UI"/>
                         </a:rPr>
-                        <a:t>Fleet Subs: 13  |  Binds: 2</a:t>
+                        <a:t>Fleet Subs: 14  |  Binds: 3</a:t>
                       </a:r>
                     </a:p>
                   </a:txBody>
@@ -3690,7 +3690,7 @@
                         <a:rPr sz="900">
                           <a:latin typeface="Segoe UI"/>
                         </a:rPr>
-                        <a:t>Fleet Bound Premium: $250,651.06</a:t>
+                        <a:t>Fleet Bound Premium: $278,797.11</a:t>
                       </a:r>
                     </a:p>
                   </a:txBody>
@@ -3727,7 +3727,7 @@
                         <a:rPr sz="900">
                           <a:latin typeface="Segoe UI"/>
                         </a:rPr>
-                        <a:t>Fleet Book %: 46.2%</a:t>
+                        <a:t>Fleet Book %: 51.4%</a:t>
                       </a:r>
                     </a:p>
                   </a:txBody>
@@ -3766,7 +3766,7 @@
                         <a:rPr sz="900">
                           <a:latin typeface="Segoe UI"/>
                         </a:rPr>
-                        <a:t>Non-Fleet Subs: 319  |  Binds: 24</a:t>
+                        <a:t>Non-Fleet Subs: 318  |  Binds: 24</a:t>
                       </a:r>
                     </a:p>
                   </a:txBody>
@@ -3803,7 +3803,7 @@
                         <a:rPr sz="900">
                           <a:latin typeface="Segoe UI"/>
                         </a:rPr>
-                        <a:t>Non-Fleet Bound Premium: $292,279.95</a:t>
+                        <a:t>Non-Fleet Bound Premium: $264,133.90</a:t>
                       </a:r>
                     </a:p>
                   </a:txBody>
@@ -3840,7 +3840,7 @@
                         <a:rPr sz="900">
                           <a:latin typeface="Segoe UI"/>
                         </a:rPr>
-                        <a:t>Non-Fleet Book %: 53.8%</a:t>
+                        <a:t>Non-Fleet Book %: 48.6%</a:t>
                       </a:r>
                     </a:p>
                   </a:txBody>
@@ -4465,7 +4465,7 @@
                         <a:rPr sz="800">
                           <a:latin typeface="Segoe UI"/>
                         </a:rPr>
-                        <a:t>125</a:t>
+                        <a:t>124</a:t>
                       </a:r>
                     </a:p>
                   </a:txBody>
@@ -4624,7 +4624,7 @@
                           </a:solidFill>
                           <a:latin typeface="Segoe UI"/>
                         </a:rPr>
-                        <a:t>16.9%</a:t>
+                        <a:t>18.1%</a:t>
                       </a:r>
                     </a:p>
                   </a:txBody>
@@ -4664,7 +4664,7 @@
                         <a:rPr sz="800">
                           <a:latin typeface="Segoe UI"/>
                         </a:rPr>
-                        <a:t>19.0%</a:t>
+                        <a:t>17.7%</a:t>
                       </a:r>
                     </a:p>
                   </a:txBody>
@@ -4747,7 +4747,7 @@
                         <a:rPr sz="800">
                           <a:latin typeface="Segoe UI"/>
                         </a:rPr>
-                        <a:t>15.2%</a:t>
+                        <a:t>15.3%</a:t>
                       </a:r>
                     </a:p>
                   </a:txBody>
@@ -4901,9 +4901,12 @@
                       <a:pPr algn="ctr"/>
                       <a:r>
                         <a:rPr sz="800">
+                          <a:solidFill>
+                            <a:srgbClr val="059669"/>
+                          </a:solidFill>
                           <a:latin typeface="Segoe UI"/>
                         </a:rPr>
-                        <a:t>14</a:t>
+                        <a:t>15</a:t>
                       </a:r>
                     </a:p>
                   </a:txBody>
@@ -4940,7 +4943,7 @@
                         <a:rPr sz="800">
                           <a:latin typeface="Segoe UI"/>
                         </a:rPr>
-                        <a:t>15</a:t>
+                        <a:t>14</a:t>
                       </a:r>
                     </a:p>
                   </a:txBody>

--- a/generated/Tier 1 Broker Scorecards/Justin Wilson_Broker_Scorecard.pptx
+++ b/generated/Tier 1 Broker Scorecards/Justin Wilson_Broker_Scorecard.pptx
@@ -3394,7 +3394,7 @@
                         <a:rPr sz="900">
                           <a:latin typeface="Segoe UI"/>
                         </a:rPr>
-                        <a:t>Tier 1  |  8.13% / 15.00%</a:t>
+                        <a:t>Tier 1  |  7.74% / 15.00%</a:t>
                       </a:r>
                     </a:p>
                   </a:txBody>
@@ -3690,7 +3690,7 @@
                         <a:rPr sz="900">
                           <a:latin typeface="Segoe UI"/>
                         </a:rPr>
-                        <a:t>Fleet Bound Premium: $278,797.11</a:t>
+                        <a:t>Fleet Bound Premium: $289,348.69</a:t>
                       </a:r>
                     </a:p>
                   </a:txBody>
@@ -3727,7 +3727,7 @@
                         <a:rPr sz="900">
                           <a:latin typeface="Segoe UI"/>
                         </a:rPr>
-                        <a:t>Fleet Book %: 51.4%</a:t>
+                        <a:t>Fleet Book %: 53.3%</a:t>
                       </a:r>
                     </a:p>
                   </a:txBody>
@@ -3766,7 +3766,7 @@
                         <a:rPr sz="900">
                           <a:latin typeface="Segoe UI"/>
                         </a:rPr>
-                        <a:t>Non-Fleet Subs: 318  |  Binds: 24</a:t>
+                        <a:t>Non-Fleet Subs: 322  |  Binds: 23</a:t>
                       </a:r>
                     </a:p>
                   </a:txBody>
@@ -3803,7 +3803,7 @@
                         <a:rPr sz="900">
                           <a:latin typeface="Segoe UI"/>
                         </a:rPr>
-                        <a:t>Non-Fleet Bound Premium: $264,133.90</a:t>
+                        <a:t>Non-Fleet Bound Premium: $253,582.32</a:t>
                       </a:r>
                     </a:p>
                   </a:txBody>
@@ -3840,7 +3840,7 @@
                         <a:rPr sz="900">
                           <a:latin typeface="Segoe UI"/>
                         </a:rPr>
-                        <a:t>Non-Fleet Book %: 48.6%</a:t>
+                        <a:t>Non-Fleet Book %: 46.7%</a:t>
                       </a:r>
                     </a:p>
                   </a:txBody>
@@ -4428,7 +4428,7 @@
                           </a:solidFill>
                           <a:latin typeface="Segoe UI"/>
                         </a:rPr>
-                        <a:t>58</a:t>
+                        <a:t>63</a:t>
                       </a:r>
                     </a:p>
                   </a:txBody>
@@ -4581,7 +4581,7 @@
                         <a:rPr sz="800">
                           <a:latin typeface="Segoe UI"/>
                         </a:rPr>
-                        <a:t>13.7%</a:t>
+                        <a:t>14.7%</a:t>
                       </a:r>
                     </a:p>
                   </a:txBody>
@@ -4664,7 +4664,7 @@
                         <a:rPr sz="800">
                           <a:latin typeface="Segoe UI"/>
                         </a:rPr>
-                        <a:t>17.7%</a:t>
+                        <a:t>19.0%</a:t>
                       </a:r>
                     </a:p>
                   </a:txBody>
@@ -4707,7 +4707,7 @@
                           </a:solidFill>
                           <a:latin typeface="Segoe UI"/>
                         </a:rPr>
-                        <a:t>6.9%</a:t>
+                        <a:t>6.3%</a:t>
                       </a:r>
                     </a:p>
                   </a:txBody>
@@ -4866,46 +4866,6 @@
                         <a:rPr sz="800">
                           <a:latin typeface="Segoe UI"/>
                         </a:rPr>
-                        <a:t>14</a:t>
-                      </a:r>
-                    </a:p>
-                  </a:txBody>
-                  <a:tcPr marL="114300" marR="91425" marT="45700" marB="45700">
-                    <a:lnL w="6350" cap="flat" cmpd="sng">
-                      <a:solidFill>
-                        <a:srgbClr val="E5E7EB"/>
-                      </a:solidFill>
-                    </a:lnL>
-                    <a:lnR w="6350" cap="flat" cmpd="sng">
-                      <a:solidFill>
-                        <a:srgbClr val="E5E7EB"/>
-                      </a:solidFill>
-                    </a:lnR>
-                    <a:lnT w="6350" cap="flat" cmpd="sng">
-                      <a:solidFill>
-                        <a:srgbClr val="E5E7EB"/>
-                      </a:solidFill>
-                    </a:lnT>
-                    <a:lnB w="6350" cap="flat" cmpd="sng">
-                      <a:solidFill>
-                        <a:srgbClr val="E5E7EB"/>
-                      </a:solidFill>
-                    </a:lnB>
-                  </a:tcPr>
-                </a:tc>
-                <a:tc>
-                  <a:txBody>
-                    <a:bodyPr/>
-                    <a:lstStyle/>
-                    <a:p>
-                      <a:pPr algn="ctr"/>
-                      <a:r>
-                        <a:rPr sz="800">
-                          <a:solidFill>
-                            <a:srgbClr val="059669"/>
-                          </a:solidFill>
-                          <a:latin typeface="Segoe UI"/>
-                        </a:rPr>
                         <a:t>15</a:t>
                       </a:r>
                     </a:p>
@@ -4943,7 +4903,44 @@
                         <a:rPr sz="800">
                           <a:latin typeface="Segoe UI"/>
                         </a:rPr>
-                        <a:t>14</a:t>
+                        <a:t>15</a:t>
+                      </a:r>
+                    </a:p>
+                  </a:txBody>
+                  <a:tcPr marL="114300" marR="91425" marT="45700" marB="45700">
+                    <a:lnL w="6350" cap="flat" cmpd="sng">
+                      <a:solidFill>
+                        <a:srgbClr val="E5E7EB"/>
+                      </a:solidFill>
+                    </a:lnL>
+                    <a:lnR w="6350" cap="flat" cmpd="sng">
+                      <a:solidFill>
+                        <a:srgbClr val="E5E7EB"/>
+                      </a:solidFill>
+                    </a:lnR>
+                    <a:lnT w="6350" cap="flat" cmpd="sng">
+                      <a:solidFill>
+                        <a:srgbClr val="E5E7EB"/>
+                      </a:solidFill>
+                    </a:lnT>
+                    <a:lnB w="6350" cap="flat" cmpd="sng">
+                      <a:solidFill>
+                        <a:srgbClr val="E5E7EB"/>
+                      </a:solidFill>
+                    </a:lnB>
+                  </a:tcPr>
+                </a:tc>
+                <a:tc>
+                  <a:txBody>
+                    <a:bodyPr/>
+                    <a:lstStyle/>
+                    <a:p>
+                      <a:pPr algn="ctr"/>
+                      <a:r>
+                        <a:rPr sz="800">
+                          <a:latin typeface="Segoe UI"/>
+                        </a:rPr>
+                        <a:t>15</a:t>
                       </a:r>
                     </a:p>
                   </a:txBody>

--- a/generated/Tier 1 Broker Scorecards/Justin Wilson_Broker_Scorecard.pptx
+++ b/generated/Tier 1 Broker Scorecards/Justin Wilson_Broker_Scorecard.pptx
@@ -3357,7 +3357,7 @@
                         <a:rPr sz="800">
                           <a:latin typeface="Segoe UI"/>
                         </a:rPr>
-                        <a:t>$1,960,018.98 / $2,024,112.65 / $542,931.01</a:t>
+                        <a:t>$1,960,018.98 / $2,024,824.85 / $543,643.21</a:t>
                       </a:r>
                     </a:p>
                   </a:txBody>
@@ -3394,7 +3394,7 @@
                         <a:rPr sz="900">
                           <a:latin typeface="Segoe UI"/>
                         </a:rPr>
-                        <a:t>Tier 1  |  7.74% / 15.00%</a:t>
+                        <a:t>Tier 1  |  7.12% / 15.00%</a:t>
                       </a:r>
                     </a:p>
                   </a:txBody>
@@ -3653,7 +3653,7 @@
                         <a:rPr sz="900">
                           <a:latin typeface="Segoe UI"/>
                         </a:rPr>
-                        <a:t>Fleet Subs: 14  |  Binds: 3</a:t>
+                        <a:t>Fleet Subs: 13  |  Binds: 2</a:t>
                       </a:r>
                     </a:p>
                   </a:txBody>
@@ -3690,7 +3690,7 @@
                         <a:rPr sz="900">
                           <a:latin typeface="Segoe UI"/>
                         </a:rPr>
-                        <a:t>Fleet Bound Premium: $289,348.69</a:t>
+                        <a:t>Fleet Bound Premium: $257,033.64</a:t>
                       </a:r>
                     </a:p>
                   </a:txBody>
@@ -3727,7 +3727,7 @@
                         <a:rPr sz="900">
                           <a:latin typeface="Segoe UI"/>
                         </a:rPr>
-                        <a:t>Fleet Book %: 53.3%</a:t>
+                        <a:t>Fleet Book %: 47.3%</a:t>
                       </a:r>
                     </a:p>
                   </a:txBody>
@@ -3766,7 +3766,7 @@
                         <a:rPr sz="900">
                           <a:latin typeface="Segoe UI"/>
                         </a:rPr>
-                        <a:t>Non-Fleet Subs: 322  |  Binds: 23</a:t>
+                        <a:t>Non-Fleet Subs: 324  |  Binds: 22</a:t>
                       </a:r>
                     </a:p>
                   </a:txBody>
@@ -3803,7 +3803,7 @@
                         <a:rPr sz="900">
                           <a:latin typeface="Segoe UI"/>
                         </a:rPr>
-                        <a:t>Non-Fleet Bound Premium: $253,582.32</a:t>
+                        <a:t>Non-Fleet Bound Premium: $286,609.57</a:t>
                       </a:r>
                     </a:p>
                   </a:txBody>
@@ -3840,7 +3840,7 @@
                         <a:rPr sz="900">
                           <a:latin typeface="Segoe UI"/>
                         </a:rPr>
-                        <a:t>Non-Fleet Book %: 46.7%</a:t>
+                        <a:t>Non-Fleet Book %: 52.7%</a:t>
                       </a:r>
                     </a:p>
                   </a:txBody>
@@ -4428,7 +4428,7 @@
                           </a:solidFill>
                           <a:latin typeface="Segoe UI"/>
                         </a:rPr>
-                        <a:t>63</a:t>
+                        <a:t>65</a:t>
                       </a:r>
                     </a:p>
                   </a:txBody>
@@ -4581,7 +4581,7 @@
                         <a:rPr sz="800">
                           <a:latin typeface="Segoe UI"/>
                         </a:rPr>
-                        <a:t>14.7%</a:t>
+                        <a:t>13.7%</a:t>
                       </a:r>
                     </a:p>
                   </a:txBody>
@@ -4624,7 +4624,7 @@
                           </a:solidFill>
                           <a:latin typeface="Segoe UI"/>
                         </a:rPr>
-                        <a:t>18.1%</a:t>
+                        <a:t>16.9%</a:t>
                       </a:r>
                     </a:p>
                   </a:txBody>
@@ -4707,7 +4707,7 @@
                           </a:solidFill>
                           <a:latin typeface="Segoe UI"/>
                         </a:rPr>
-                        <a:t>6.3%</a:t>
+                        <a:t>7.7%</a:t>
                       </a:r>
                     </a:p>
                   </a:txBody>
@@ -4866,7 +4866,44 @@
                         <a:rPr sz="800">
                           <a:latin typeface="Segoe UI"/>
                         </a:rPr>
-                        <a:t>15</a:t>
+                        <a:t>14</a:t>
+                      </a:r>
+                    </a:p>
+                  </a:txBody>
+                  <a:tcPr marL="114300" marR="91425" marT="45700" marB="45700">
+                    <a:lnL w="6350" cap="flat" cmpd="sng">
+                      <a:solidFill>
+                        <a:srgbClr val="E5E7EB"/>
+                      </a:solidFill>
+                    </a:lnL>
+                    <a:lnR w="6350" cap="flat" cmpd="sng">
+                      <a:solidFill>
+                        <a:srgbClr val="E5E7EB"/>
+                      </a:solidFill>
+                    </a:lnR>
+                    <a:lnT w="6350" cap="flat" cmpd="sng">
+                      <a:solidFill>
+                        <a:srgbClr val="E5E7EB"/>
+                      </a:solidFill>
+                    </a:lnT>
+                    <a:lnB w="6350" cap="flat" cmpd="sng">
+                      <a:solidFill>
+                        <a:srgbClr val="E5E7EB"/>
+                      </a:solidFill>
+                    </a:lnB>
+                  </a:tcPr>
+                </a:tc>
+                <a:tc>
+                  <a:txBody>
+                    <a:bodyPr/>
+                    <a:lstStyle/>
+                    <a:p>
+                      <a:pPr algn="ctr"/>
+                      <a:r>
+                        <a:rPr sz="800">
+                          <a:latin typeface="Segoe UI"/>
+                        </a:rPr>
+                        <a:t>14</a:t>
                       </a:r>
                     </a:p>
                   </a:txBody>
@@ -4938,49 +4975,12 @@
                       <a:pPr algn="ctr"/>
                       <a:r>
                         <a:rPr sz="800">
-                          <a:latin typeface="Segoe UI"/>
-                        </a:rPr>
-                        <a:t>15</a:t>
-                      </a:r>
-                    </a:p>
-                  </a:txBody>
-                  <a:tcPr marL="114300" marR="91425" marT="45700" marB="45700">
-                    <a:lnL w="6350" cap="flat" cmpd="sng">
-                      <a:solidFill>
-                        <a:srgbClr val="E5E7EB"/>
-                      </a:solidFill>
-                    </a:lnL>
-                    <a:lnR w="6350" cap="flat" cmpd="sng">
-                      <a:solidFill>
-                        <a:srgbClr val="E5E7EB"/>
-                      </a:solidFill>
-                    </a:lnR>
-                    <a:lnT w="6350" cap="flat" cmpd="sng">
-                      <a:solidFill>
-                        <a:srgbClr val="E5E7EB"/>
-                      </a:solidFill>
-                    </a:lnT>
-                    <a:lnB w="6350" cap="flat" cmpd="sng">
-                      <a:solidFill>
-                        <a:srgbClr val="E5E7EB"/>
-                      </a:solidFill>
-                    </a:lnB>
-                  </a:tcPr>
-                </a:tc>
-                <a:tc>
-                  <a:txBody>
-                    <a:bodyPr/>
-                    <a:lstStyle/>
-                    <a:p>
-                      <a:pPr algn="ctr"/>
-                      <a:r>
-                        <a:rPr sz="800">
                           <a:solidFill>
                             <a:srgbClr val="DC2626"/>
                           </a:solidFill>
                           <a:latin typeface="Segoe UI"/>
                         </a:rPr>
-                        <a:t>4</a:t>
+                        <a:t>5</a:t>
                       </a:r>
                     </a:p>
                   </a:txBody>
@@ -5259,7 +5259,7 @@
                           </a:solidFill>
                           <a:latin typeface="Segoe UI"/>
                         </a:rPr>
-                        <a:t>$16.7K</a:t>
+                        <a:t>$17.4K</a:t>
                       </a:r>
                     </a:p>
                   </a:txBody>

--- a/generated/Tier 1 Broker Scorecards/Justin Wilson_Broker_Scorecard.pptx
+++ b/generated/Tier 1 Broker Scorecards/Justin Wilson_Broker_Scorecard.pptx
@@ -3394,7 +3394,7 @@
                         <a:rPr sz="900">
                           <a:latin typeface="Segoe UI"/>
                         </a:rPr>
-                        <a:t>Tier 1  |  7.12% / 15.00%</a:t>
+                        <a:t>Tier 1  |  7.35% / 15.00%</a:t>
                       </a:r>
                     </a:p>
                   </a:txBody>
@@ -3690,7 +3690,7 @@
                         <a:rPr sz="900">
                           <a:latin typeface="Segoe UI"/>
                         </a:rPr>
-                        <a:t>Fleet Bound Premium: $257,033.64</a:t>
+                        <a:t>Fleet Bound Premium: $249,992.42</a:t>
                       </a:r>
                     </a:p>
                   </a:txBody>
@@ -3727,7 +3727,7 @@
                         <a:rPr sz="900">
                           <a:latin typeface="Segoe UI"/>
                         </a:rPr>
-                        <a:t>Fleet Book %: 47.3%</a:t>
+                        <a:t>Fleet Book %: 46.0%</a:t>
                       </a:r>
                     </a:p>
                   </a:txBody>
@@ -3766,7 +3766,7 @@
                         <a:rPr sz="900">
                           <a:latin typeface="Segoe UI"/>
                         </a:rPr>
-                        <a:t>Non-Fleet Subs: 324  |  Binds: 22</a:t>
+                        <a:t>Non-Fleet Subs: 327  |  Binds: 23</a:t>
                       </a:r>
                     </a:p>
                   </a:txBody>
@@ -3803,7 +3803,7 @@
                         <a:rPr sz="900">
                           <a:latin typeface="Segoe UI"/>
                         </a:rPr>
-                        <a:t>Non-Fleet Bound Premium: $286,609.57</a:t>
+                        <a:t>Non-Fleet Bound Premium: $293,650.79</a:t>
                       </a:r>
                     </a:p>
                   </a:txBody>
@@ -3840,7 +3840,7 @@
                         <a:rPr sz="900">
                           <a:latin typeface="Segoe UI"/>
                         </a:rPr>
-                        <a:t>Non-Fleet Book %: 52.7%</a:t>
+                        <a:t>Non-Fleet Book %: 54.0%</a:t>
                       </a:r>
                     </a:p>
                   </a:txBody>
@@ -4428,7 +4428,7 @@
                           </a:solidFill>
                           <a:latin typeface="Segoe UI"/>
                         </a:rPr>
-                        <a:t>65</a:t>
+                        <a:t>68</a:t>
                       </a:r>
                     </a:p>
                   </a:txBody>
@@ -4465,7 +4465,7 @@
                         <a:rPr sz="800">
                           <a:latin typeface="Segoe UI"/>
                         </a:rPr>
-                        <a:t>124</a:t>
+                        <a:t>125</a:t>
                       </a:r>
                     </a:p>
                   </a:txBody>
@@ -4664,7 +4664,7 @@
                         <a:rPr sz="800">
                           <a:latin typeface="Segoe UI"/>
                         </a:rPr>
-                        <a:t>19.0%</a:t>
+                        <a:t>17.7%</a:t>
                       </a:r>
                     </a:p>
                   </a:txBody>
@@ -4707,7 +4707,7 @@
                           </a:solidFill>
                           <a:latin typeface="Segoe UI"/>
                         </a:rPr>
-                        <a:t>7.7%</a:t>
+                        <a:t>7.4%</a:t>
                       </a:r>
                     </a:p>
                   </a:txBody>
@@ -4747,7 +4747,7 @@
                         <a:rPr sz="800">
                           <a:latin typeface="Segoe UI"/>
                         </a:rPr>
-                        <a:t>15.3%</a:t>
+                        <a:t>15.2%</a:t>
                       </a:r>
                     </a:p>
                   </a:txBody>
@@ -4940,7 +4940,7 @@
                         <a:rPr sz="800">
                           <a:latin typeface="Segoe UI"/>
                         </a:rPr>
-                        <a:t>15</a:t>
+                        <a:t>14</a:t>
                       </a:r>
                     </a:p>
                   </a:txBody>

--- a/generated/Tier 1 Broker Scorecards/Justin Wilson_Broker_Scorecard.pptx
+++ b/generated/Tier 1 Broker Scorecards/Justin Wilson_Broker_Scorecard.pptx
@@ -3357,7 +3357,7 @@
                         <a:rPr sz="800">
                           <a:latin typeface="Segoe UI"/>
                         </a:rPr>
-                        <a:t>$1,960,018.98 / $2,024,824.85 / $543,643.21</a:t>
+                        <a:t>$1,960,018.98 / $2,044,062.17 / $562,880.53</a:t>
                       </a:r>
                     </a:p>
                   </a:txBody>
@@ -3394,7 +3394,7 @@
                         <a:rPr sz="900">
                           <a:latin typeface="Segoe UI"/>
                         </a:rPr>
-                        <a:t>Tier 1  |  7.35% / 15.00%</a:t>
+                        <a:t>Tier 1  |  8.14% / 15.00%</a:t>
                       </a:r>
                     </a:p>
                   </a:txBody>
@@ -3431,7 +3431,7 @@
                         <a:rPr sz="900">
                           <a:latin typeface="Segoe UI"/>
                         </a:rPr>
-                        <a:t>$2,744,026.57  (19.8% achieved)</a:t>
+                        <a:t>$2,744,026.57  (20.5% achieved)</a:t>
                       </a:r>
                     </a:p>
                   </a:txBody>
@@ -3653,7 +3653,7 @@
                         <a:rPr sz="900">
                           <a:latin typeface="Segoe UI"/>
                         </a:rPr>
-                        <a:t>Fleet Subs: 13  |  Binds: 2</a:t>
+                        <a:t>Fleet Subs: 14  |  Binds: 3</a:t>
                       </a:r>
                     </a:p>
                   </a:txBody>
@@ -3690,7 +3690,7 @@
                         <a:rPr sz="900">
                           <a:latin typeface="Segoe UI"/>
                         </a:rPr>
-                        <a:t>Fleet Bound Premium: $249,992.42</a:t>
+                        <a:t>Fleet Bound Premium: $280,253.28</a:t>
                       </a:r>
                     </a:p>
                   </a:txBody>
@@ -3727,7 +3727,7 @@
                         <a:rPr sz="900">
                           <a:latin typeface="Segoe UI"/>
                         </a:rPr>
-                        <a:t>Fleet Book %: 46.0%</a:t>
+                        <a:t>Fleet Book %: 49.8%</a:t>
                       </a:r>
                     </a:p>
                   </a:txBody>
@@ -3766,7 +3766,7 @@
                         <a:rPr sz="900">
                           <a:latin typeface="Segoe UI"/>
                         </a:rPr>
-                        <a:t>Non-Fleet Subs: 327  |  Binds: 23</a:t>
+                        <a:t>Non-Fleet Subs: 330  |  Binds: 25</a:t>
                       </a:r>
                     </a:p>
                   </a:txBody>
@@ -3803,7 +3803,7 @@
                         <a:rPr sz="900">
                           <a:latin typeface="Segoe UI"/>
                         </a:rPr>
-                        <a:t>Non-Fleet Bound Premium: $293,650.79</a:t>
+                        <a:t>Non-Fleet Bound Premium: $282,627.25</a:t>
                       </a:r>
                     </a:p>
                   </a:txBody>
@@ -3840,7 +3840,7 @@
                         <a:rPr sz="900">
                           <a:latin typeface="Segoe UI"/>
                         </a:rPr>
-                        <a:t>Non-Fleet Book %: 54.0%</a:t>
+                        <a:t>Non-Fleet Book %: 50.2%</a:t>
                       </a:r>
                     </a:p>
                   </a:txBody>
@@ -4428,7 +4428,7 @@
                           </a:solidFill>
                           <a:latin typeface="Segoe UI"/>
                         </a:rPr>
-                        <a:t>68</a:t>
+                        <a:t>72</a:t>
                       </a:r>
                     </a:p>
                   </a:txBody>
@@ -4624,7 +4624,7 @@
                           </a:solidFill>
                           <a:latin typeface="Segoe UI"/>
                         </a:rPr>
-                        <a:t>16.9%</a:t>
+                        <a:t>19.3%</a:t>
                       </a:r>
                     </a:p>
                   </a:txBody>
@@ -4664,7 +4664,7 @@
                         <a:rPr sz="800">
                           <a:latin typeface="Segoe UI"/>
                         </a:rPr>
-                        <a:t>17.7%</a:t>
+                        <a:t>20.3%</a:t>
                       </a:r>
                     </a:p>
                   </a:txBody>
@@ -4707,7 +4707,7 @@
                           </a:solidFill>
                           <a:latin typeface="Segoe UI"/>
                         </a:rPr>
-                        <a:t>7.4%</a:t>
+                        <a:t>8.3%</a:t>
                       </a:r>
                     </a:p>
                   </a:txBody>
@@ -4901,9 +4901,12 @@
                       <a:pPr algn="ctr"/>
                       <a:r>
                         <a:rPr sz="800">
+                          <a:solidFill>
+                            <a:srgbClr val="059669"/>
+                          </a:solidFill>
                           <a:latin typeface="Segoe UI"/>
                         </a:rPr>
-                        <a:t>14</a:t>
+                        <a:t>16</a:t>
                       </a:r>
                     </a:p>
                   </a:txBody>
@@ -4940,7 +4943,7 @@
                         <a:rPr sz="800">
                           <a:latin typeface="Segoe UI"/>
                         </a:rPr>
-                        <a:t>14</a:t>
+                        <a:t>16</a:t>
                       </a:r>
                     </a:p>
                   </a:txBody>
@@ -4980,7 +4983,7 @@
                           </a:solidFill>
                           <a:latin typeface="Segoe UI"/>
                         </a:rPr>
-                        <a:t>5</a:t>
+                        <a:t>6</a:t>
                       </a:r>
                     </a:p>
                   </a:txBody>
@@ -5259,7 +5262,7 @@
                           </a:solidFill>
                           <a:latin typeface="Segoe UI"/>
                         </a:rPr>
-                        <a:t>$17.4K</a:t>
+                        <a:t>$36.7K</a:t>
                       </a:r>
                     </a:p>
                   </a:txBody>
@@ -5336,10 +5339,13 @@
                     <a:p>
                       <a:pPr algn="ctr"/>
                       <a:r>
-                        <a:rPr sz="800">
+                        <a:rPr sz="800" b="1">
+                          <a:solidFill>
+                            <a:srgbClr val="DC2626"/>
+                          </a:solidFill>
                           <a:latin typeface="Segoe UI"/>
                         </a:rPr>
-                        <a:t/>
+                        <a:t>$1.2K</a:t>
                       </a:r>
                     </a:p>
                   </a:txBody>

--- a/generated/Tier 1 Broker Scorecards/Justin Wilson_Broker_Scorecard.pptx
+++ b/generated/Tier 1 Broker Scorecards/Justin Wilson_Broker_Scorecard.pptx
@@ -3394,7 +3394,7 @@
                         <a:rPr sz="900">
                           <a:latin typeface="Segoe UI"/>
                         </a:rPr>
-                        <a:t>Tier 1  |  8.14% / 15.00%</a:t>
+                        <a:t>Tier 1  |  7.85% / 15.00%</a:t>
                       </a:r>
                     </a:p>
                   </a:txBody>
@@ -3690,7 +3690,7 @@
                         <a:rPr sz="900">
                           <a:latin typeface="Segoe UI"/>
                         </a:rPr>
-                        <a:t>Fleet Bound Premium: $280,253.28</a:t>
+                        <a:t>Fleet Bound Premium: $287,173.68</a:t>
                       </a:r>
                     </a:p>
                   </a:txBody>
@@ -3727,7 +3727,7 @@
                         <a:rPr sz="900">
                           <a:latin typeface="Segoe UI"/>
                         </a:rPr>
-                        <a:t>Fleet Book %: 49.8%</a:t>
+                        <a:t>Fleet Book %: 51.0%</a:t>
                       </a:r>
                     </a:p>
                   </a:txBody>
@@ -3766,7 +3766,7 @@
                         <a:rPr sz="900">
                           <a:latin typeface="Segoe UI"/>
                         </a:rPr>
-                        <a:t>Non-Fleet Subs: 330  |  Binds: 25</a:t>
+                        <a:t>Non-Fleet Subs: 330  |  Binds: 24</a:t>
                       </a:r>
                     </a:p>
                   </a:txBody>
@@ -3803,7 +3803,7 @@
                         <a:rPr sz="900">
                           <a:latin typeface="Segoe UI"/>
                         </a:rPr>
-                        <a:t>Non-Fleet Bound Premium: $282,627.25</a:t>
+                        <a:t>Non-Fleet Bound Premium: $275,706.85</a:t>
                       </a:r>
                     </a:p>
                   </a:txBody>
@@ -3840,7 +3840,7 @@
                         <a:rPr sz="900">
                           <a:latin typeface="Segoe UI"/>
                         </a:rPr>
-                        <a:t>Non-Fleet Book %: 50.2%</a:t>
+                        <a:t>Non-Fleet Book %: 49.0%</a:t>
                       </a:r>
                     </a:p>
                   </a:txBody>
@@ -4465,7 +4465,7 @@
                         <a:rPr sz="800">
                           <a:latin typeface="Segoe UI"/>
                         </a:rPr>
-                        <a:t>125</a:t>
+                        <a:t>124</a:t>
                       </a:r>
                     </a:p>
                   </a:txBody>
@@ -4581,7 +4581,7 @@
                         <a:rPr sz="800">
                           <a:latin typeface="Segoe UI"/>
                         </a:rPr>
-                        <a:t>13.7%</a:t>
+                        <a:t>14.7%</a:t>
                       </a:r>
                     </a:p>
                   </a:txBody>
@@ -4664,7 +4664,7 @@
                         <a:rPr sz="800">
                           <a:latin typeface="Segoe UI"/>
                         </a:rPr>
-                        <a:t>20.3%</a:t>
+                        <a:t>19.0%</a:t>
                       </a:r>
                     </a:p>
                   </a:txBody>
@@ -4747,7 +4747,7 @@
                         <a:rPr sz="800">
                           <a:latin typeface="Segoe UI"/>
                         </a:rPr>
-                        <a:t>15.2%</a:t>
+                        <a:t>15.3%</a:t>
                       </a:r>
                     </a:p>
                   </a:txBody>
@@ -4866,7 +4866,7 @@
                         <a:rPr sz="800">
                           <a:latin typeface="Segoe UI"/>
                         </a:rPr>
-                        <a:t>14</a:t>
+                        <a:t>15</a:t>
                       </a:r>
                     </a:p>
                   </a:txBody>
@@ -4943,7 +4943,7 @@
                         <a:rPr sz="800">
                           <a:latin typeface="Segoe UI"/>
                         </a:rPr>
-                        <a:t>16</a:t>
+                        <a:t>15</a:t>
                       </a:r>
                     </a:p>
                   </a:txBody>

--- a/generated/Tier 1 Broker Scorecards/Justin Wilson_Broker_Scorecard.pptx
+++ b/generated/Tier 1 Broker Scorecards/Justin Wilson_Broker_Scorecard.pptx
@@ -3357,7 +3357,7 @@
                         <a:rPr sz="800">
                           <a:latin typeface="Segoe UI"/>
                         </a:rPr>
-                        <a:t>$1,960,018.98 / $2,044,062.17 / $562,880.53</a:t>
+                        <a:t>$1,960,018.98 / $1,977,137.44 / $564,103.15</a:t>
                       </a:r>
                     </a:p>
                   </a:txBody>
@@ -3394,7 +3394,7 @@
                         <a:rPr sz="900">
                           <a:latin typeface="Segoe UI"/>
                         </a:rPr>
-                        <a:t>Tier 1  |  7.85% / 15.00%</a:t>
+                        <a:t>Tier 1  |  8.14% / 15.00%</a:t>
                       </a:r>
                     </a:p>
                   </a:txBody>
@@ -3431,7 +3431,7 @@
                         <a:rPr sz="900">
                           <a:latin typeface="Segoe UI"/>
                         </a:rPr>
-                        <a:t>$2,744,026.57  (20.5% achieved)</a:t>
+                        <a:t>$2,744,026.57  (20.6% achieved)</a:t>
                       </a:r>
                     </a:p>
                   </a:txBody>
@@ -3690,7 +3690,7 @@
                         <a:rPr sz="900">
                           <a:latin typeface="Segoe UI"/>
                         </a:rPr>
-                        <a:t>Fleet Bound Premium: $287,173.68</a:t>
+                        <a:t>Fleet Bound Premium: $280,862.02</a:t>
                       </a:r>
                     </a:p>
                   </a:txBody>
@@ -3727,7 +3727,7 @@
                         <a:rPr sz="900">
                           <a:latin typeface="Segoe UI"/>
                         </a:rPr>
-                        <a:t>Fleet Book %: 51.0%</a:t>
+                        <a:t>Fleet Book %: 49.8%</a:t>
                       </a:r>
                     </a:p>
                   </a:txBody>
@@ -3766,7 +3766,7 @@
                         <a:rPr sz="900">
                           <a:latin typeface="Segoe UI"/>
                         </a:rPr>
-                        <a:t>Non-Fleet Subs: 330  |  Binds: 24</a:t>
+                        <a:t>Non-Fleet Subs: 330  |  Binds: 25</a:t>
                       </a:r>
                     </a:p>
                   </a:txBody>
@@ -3803,7 +3803,7 @@
                         <a:rPr sz="900">
                           <a:latin typeface="Segoe UI"/>
                         </a:rPr>
-                        <a:t>Non-Fleet Bound Premium: $275,706.85</a:t>
+                        <a:t>Non-Fleet Bound Premium: $283,241.13</a:t>
                       </a:r>
                     </a:p>
                   </a:txBody>
@@ -3840,7 +3840,7 @@
                         <a:rPr sz="900">
                           <a:latin typeface="Segoe UI"/>
                         </a:rPr>
-                        <a:t>Non-Fleet Book %: 49.0%</a:t>
+                        <a:t>Non-Fleet Book %: 50.2%</a:t>
                       </a:r>
                     </a:p>
                   </a:txBody>
@@ -4465,7 +4465,7 @@
                         <a:rPr sz="800">
                           <a:latin typeface="Segoe UI"/>
                         </a:rPr>
-                        <a:t>124</a:t>
+                        <a:t>125</a:t>
                       </a:r>
                     </a:p>
                   </a:txBody>
@@ -4581,7 +4581,7 @@
                         <a:rPr sz="800">
                           <a:latin typeface="Segoe UI"/>
                         </a:rPr>
-                        <a:t>14.7%</a:t>
+                        <a:t>13.7%</a:t>
                       </a:r>
                     </a:p>
                   </a:txBody>
@@ -4664,7 +4664,7 @@
                         <a:rPr sz="800">
                           <a:latin typeface="Segoe UI"/>
                         </a:rPr>
-                        <a:t>19.0%</a:t>
+                        <a:t>17.7%</a:t>
                       </a:r>
                     </a:p>
                   </a:txBody>
@@ -4747,7 +4747,7 @@
                         <a:rPr sz="800">
                           <a:latin typeface="Segoe UI"/>
                         </a:rPr>
-                        <a:t>15.3%</a:t>
+                        <a:t>15.2%</a:t>
                       </a:r>
                     </a:p>
                   </a:txBody>
@@ -4866,7 +4866,7 @@
                         <a:rPr sz="800">
                           <a:latin typeface="Segoe UI"/>
                         </a:rPr>
-                        <a:t>15</a:t>
+                        <a:t>14</a:t>
                       </a:r>
                     </a:p>
                   </a:txBody>
@@ -4943,7 +4943,7 @@
                         <a:rPr sz="800">
                           <a:latin typeface="Segoe UI"/>
                         </a:rPr>
-                        <a:t>15</a:t>
+                        <a:t>14</a:t>
                       </a:r>
                     </a:p>
                   </a:txBody>
